--- a/Apresentações/03  - Estruturas de Dados.pptx
+++ b/Apresentações/03  - Estruturas de Dados.pptx
@@ -26789,7 +26789,7 @@
               <a:buNone/>
             </a:pPr>
             <a:r>
-              <a:rPr lang="pt-BR" sz="2000">
+              <a:rPr lang="pt-BR" sz="2000" dirty="0">
                 <a:solidFill>
                   <a:srgbClr val="000000"/>
                 </a:solidFill>
@@ -26804,7 +26804,7 @@
               <a:buNone/>
             </a:pPr>
             <a:br>
-              <a:rPr lang="pt-BR" sz="2000">
+              <a:rPr lang="pt-BR" sz="2000" dirty="0">
                 <a:solidFill>
                   <a:srgbClr val="000000"/>
                 </a:solidFill>
@@ -26813,7 +26813,7 @@
               </a:rPr>
             </a:br>
             <a:r>
-              <a:rPr lang="pt-BR" sz="2000">
+              <a:rPr lang="pt-BR" sz="2000" dirty="0">
                 <a:solidFill>
                   <a:srgbClr val="000000"/>
                 </a:solidFill>
